--- a/Seminario de Sistemas/Clases/Clase 12 - Diagramas UML avanzados/Presentacion.pptx
+++ b/Seminario de Sistemas/Clases/Clase 12 - Diagramas UML avanzados/Presentacion.pptx
@@ -5469,7 +5469,7 @@
                 </a:solidFill>
                 <a:latin typeface="Calibri"/>
               </a:rPr>
-              <a:t>Entrega en ExamLab (examlab.lovable.app/app)</a:t>
+              <a:t>Entrega en ExamLab (https://examlab.lovable.app/)</a:t>
             </a:r>
             <a:r>
               <a:rPr sz="1600" b="0" i="0">
@@ -6073,7 +6073,7 @@
                 </a:solidFill>
                 <a:latin typeface="Calibri"/>
               </a:rPr>
-              <a:t>Entrega del taller en ExamLab (examlab.lovable.app/app) · domingo 23:59.</a:t>
+              <a:t>Entrega del taller en ExamLab (https://examlab.lovable.app/) · domingo 23:59.</a:t>
             </a:r>
           </a:p>
         </p:txBody>

--- a/Seminario de Sistemas/Clases/Clase 12 - Diagramas UML avanzados/Presentacion.pptx
+++ b/Seminario de Sistemas/Clases/Clase 12 - Diagramas UML avanzados/Presentacion.pptx
@@ -7773,22 +7773,6 @@
                 <a:latin typeface="Calibri"/>
               </a:rPr>
               <a:t>–   Los flujos alternos tambien se modelan, y para eso existen los fragmentos combinados, que son esos recuadros con…</a:t>
-            </a:r>
-          </a:p>
-          <a:p>
-            <a:pPr>
-              <a:spcAft>
-                <a:spcPts val="800"/>
-              </a:spcAft>
-            </a:pPr>
-            <a:r>
-              <a:rPr sz="1500" b="0" i="0">
-                <a:solidFill>
-                  <a:srgbClr val="333333"/>
-                </a:solidFill>
-                <a:latin typeface="Calibri"/>
-              </a:rPr>
-              <a:t>–   Error tipico del docente que no domina el tema: confundir el diagrama de secuencia con un diagrama de flujo y…</a:t>
             </a:r>
           </a:p>
         </p:txBody>

--- a/Seminario de Sistemas/Clases/Clase 12 - Diagramas UML avanzados/Presentacion.pptx
+++ b/Seminario de Sistemas/Clases/Clase 12 - Diagramas UML avanzados/Presentacion.pptx
@@ -5469,7 +5469,7 @@
                 </a:solidFill>
                 <a:latin typeface="Calibri"/>
               </a:rPr>
-              <a:t>Entrega en ExamLab (https://examlab.lovable.app/)</a:t>
+              <a:t>Entrega en ExamLab (https://uniaj.examlab.workers.dev/)</a:t>
             </a:r>
             <a:r>
               <a:rPr sz="1600" b="0" i="0">
@@ -6073,7 +6073,7 @@
                 </a:solidFill>
                 <a:latin typeface="Calibri"/>
               </a:rPr>
-              <a:t>Entrega del taller en ExamLab (https://examlab.lovable.app/) · domingo 23:59.</a:t>
+              <a:t>Entrega del taller en ExamLab (https://uniaj.examlab.workers.dev/) · domingo 23:59.</a:t>
             </a:r>
           </a:p>
         </p:txBody>

--- a/Seminario de Sistemas/Clases/Clase 12 - Diagramas UML avanzados/Presentacion.pptx
+++ b/Seminario de Sistemas/Clases/Clase 12 - Diagramas UML avanzados/Presentacion.pptx
@@ -3633,7 +3633,7 @@
         <p:spPr>
           <a:xfrm>
             <a:off x="457200" y="1234440"/>
-            <a:ext cx="11277295" cy="777240"/>
+            <a:ext cx="11277295" cy="950976"/>
           </a:xfrm>
           <a:prstGeom prst="roundRect">
             <a:avLst>
@@ -3677,7 +3677,7 @@
         </p:nvSpPr>
         <p:spPr>
           <a:xfrm>
-            <a:off x="594360" y="1403604"/>
+            <a:off x="594360" y="1490472"/>
             <a:ext cx="438912" cy="438912"/>
           </a:xfrm>
           <a:prstGeom prst="roundRect">
@@ -3722,7 +3722,7 @@
         </p:nvSpPr>
         <p:spPr>
           <a:xfrm>
-            <a:off x="594360" y="1403604"/>
+            <a:off x="594360" y="1490472"/>
             <a:ext cx="438912" cy="438912"/>
           </a:xfrm>
           <a:prstGeom prst="rect">
@@ -3756,7 +3756,7 @@
         <p:spPr>
           <a:xfrm>
             <a:off x="1188720" y="1325880"/>
-            <a:ext cx="10271455" cy="612647"/>
+            <a:ext cx="10271455" cy="786384"/>
           </a:xfrm>
           <a:prstGeom prst="rect">
             <a:avLst/>
@@ -3787,8 +3787,8 @@
         </p:nvSpPr>
         <p:spPr>
           <a:xfrm>
-            <a:off x="457200" y="2103120"/>
-            <a:ext cx="11277295" cy="777240"/>
+            <a:off x="457200" y="2276856"/>
+            <a:ext cx="11277295" cy="950976"/>
           </a:xfrm>
           <a:prstGeom prst="roundRect">
             <a:avLst>
@@ -3832,7 +3832,7 @@
         </p:nvSpPr>
         <p:spPr>
           <a:xfrm>
-            <a:off x="594360" y="2272284"/>
+            <a:off x="594360" y="2532888"/>
             <a:ext cx="438912" cy="438912"/>
           </a:xfrm>
           <a:prstGeom prst="roundRect">
@@ -3877,7 +3877,7 @@
         </p:nvSpPr>
         <p:spPr>
           <a:xfrm>
-            <a:off x="594360" y="2272284"/>
+            <a:off x="594360" y="2532888"/>
             <a:ext cx="438912" cy="438912"/>
           </a:xfrm>
           <a:prstGeom prst="rect">
@@ -3910,8 +3910,8 @@
         </p:nvSpPr>
         <p:spPr>
           <a:xfrm>
-            <a:off x="1188720" y="2194560"/>
-            <a:ext cx="10271455" cy="612647"/>
+            <a:off x="1188720" y="2368296"/>
+            <a:ext cx="10271455" cy="786384"/>
           </a:xfrm>
           <a:prstGeom prst="rect">
             <a:avLst/>
@@ -3942,8 +3942,8 @@
         </p:nvSpPr>
         <p:spPr>
           <a:xfrm>
-            <a:off x="457200" y="2971800"/>
-            <a:ext cx="11277295" cy="777240"/>
+            <a:off x="457200" y="3319272"/>
+            <a:ext cx="11277295" cy="950976"/>
           </a:xfrm>
           <a:prstGeom prst="roundRect">
             <a:avLst>
@@ -3987,7 +3987,7 @@
         </p:nvSpPr>
         <p:spPr>
           <a:xfrm>
-            <a:off x="594360" y="3140964"/>
+            <a:off x="594360" y="3575304"/>
             <a:ext cx="438912" cy="438912"/>
           </a:xfrm>
           <a:prstGeom prst="roundRect">
@@ -4032,7 +4032,7 @@
         </p:nvSpPr>
         <p:spPr>
           <a:xfrm>
-            <a:off x="594360" y="3140964"/>
+            <a:off x="594360" y="3575304"/>
             <a:ext cx="438912" cy="438912"/>
           </a:xfrm>
           <a:prstGeom prst="rect">
@@ -4065,8 +4065,8 @@
         </p:nvSpPr>
         <p:spPr>
           <a:xfrm>
-            <a:off x="1188720" y="3063240"/>
-            <a:ext cx="10271455" cy="612647"/>
+            <a:off x="1188720" y="3410712"/>
+            <a:ext cx="10271455" cy="786384"/>
           </a:xfrm>
           <a:prstGeom prst="rect">
             <a:avLst/>
@@ -4097,8 +4097,8 @@
         </p:nvSpPr>
         <p:spPr>
           <a:xfrm>
-            <a:off x="457200" y="3840479"/>
-            <a:ext cx="11277295" cy="777240"/>
+            <a:off x="457200" y="4361688"/>
+            <a:ext cx="11277295" cy="950976"/>
           </a:xfrm>
           <a:prstGeom prst="roundRect">
             <a:avLst>
@@ -4142,7 +4142,7 @@
         </p:nvSpPr>
         <p:spPr>
           <a:xfrm>
-            <a:off x="594360" y="4009643"/>
+            <a:off x="594360" y="4617720"/>
             <a:ext cx="438912" cy="438912"/>
           </a:xfrm>
           <a:prstGeom prst="roundRect">
@@ -4187,7 +4187,7 @@
         </p:nvSpPr>
         <p:spPr>
           <a:xfrm>
-            <a:off x="594360" y="4009643"/>
+            <a:off x="594360" y="4617720"/>
             <a:ext cx="438912" cy="438912"/>
           </a:xfrm>
           <a:prstGeom prst="rect">
@@ -4220,8 +4220,8 @@
         </p:nvSpPr>
         <p:spPr>
           <a:xfrm>
-            <a:off x="1188720" y="3931919"/>
-            <a:ext cx="10271455" cy="612647"/>
+            <a:off x="1188720" y="4453128"/>
+            <a:ext cx="10271455" cy="786384"/>
           </a:xfrm>
           <a:prstGeom prst="rect">
             <a:avLst/>
@@ -4252,8 +4252,8 @@
         </p:nvSpPr>
         <p:spPr>
           <a:xfrm>
-            <a:off x="457200" y="4709160"/>
-            <a:ext cx="11277295" cy="777240"/>
+            <a:off x="457200" y="5404104"/>
+            <a:ext cx="11277295" cy="950976"/>
           </a:xfrm>
           <a:prstGeom prst="roundRect">
             <a:avLst>
@@ -4297,7 +4297,7 @@
         </p:nvSpPr>
         <p:spPr>
           <a:xfrm>
-            <a:off x="594360" y="4878324"/>
+            <a:off x="594360" y="5660136"/>
             <a:ext cx="438912" cy="438912"/>
           </a:xfrm>
           <a:prstGeom prst="roundRect">
@@ -4342,7 +4342,7 @@
         </p:nvSpPr>
         <p:spPr>
           <a:xfrm>
-            <a:off x="594360" y="4878324"/>
+            <a:off x="594360" y="5660136"/>
             <a:ext cx="438912" cy="438912"/>
           </a:xfrm>
           <a:prstGeom prst="rect">
@@ -4375,8 +4375,8 @@
         </p:nvSpPr>
         <p:spPr>
           <a:xfrm>
-            <a:off x="1188720" y="4800600"/>
-            <a:ext cx="10271455" cy="612647"/>
+            <a:off x="1188720" y="5495544"/>
+            <a:ext cx="10271455" cy="786384"/>
           </a:xfrm>
           <a:prstGeom prst="rect">
             <a:avLst/>
@@ -9090,8 +9090,8 @@
         </p:blipFill>
         <p:spPr>
           <a:xfrm>
-            <a:off x="1743913" y="1792224"/>
-            <a:ext cx="1051560" cy="1051560"/>
+            <a:off x="1643329" y="1847087"/>
+            <a:ext cx="1252728" cy="1252728"/>
           </a:xfrm>
           <a:prstGeom prst="rect">
             <a:avLst/>
@@ -9106,8 +9106,8 @@
         </p:nvSpPr>
         <p:spPr>
           <a:xfrm>
-            <a:off x="530352" y="2916936"/>
-            <a:ext cx="3478682" cy="502920"/>
+            <a:off x="530352" y="3191256"/>
+            <a:ext cx="3478682" cy="621792"/>
           </a:xfrm>
           <a:prstGeom prst="rect">
             <a:avLst/>
@@ -9294,8 +9294,8 @@
         </p:blipFill>
         <p:spPr>
           <a:xfrm>
-            <a:off x="5570067" y="1792224"/>
-            <a:ext cx="1051560" cy="1051560"/>
+            <a:off x="5469483" y="1847087"/>
+            <a:ext cx="1252728" cy="1252728"/>
           </a:xfrm>
           <a:prstGeom prst="rect">
             <a:avLst/>
@@ -9310,8 +9310,8 @@
         </p:nvSpPr>
         <p:spPr>
           <a:xfrm>
-            <a:off x="4356506" y="2916936"/>
-            <a:ext cx="3478682" cy="502920"/>
+            <a:off x="4356506" y="3191256"/>
+            <a:ext cx="3478682" cy="621792"/>
           </a:xfrm>
           <a:prstGeom prst="rect">
             <a:avLst/>
@@ -9498,8 +9498,8 @@
         </p:blipFill>
         <p:spPr>
           <a:xfrm>
-            <a:off x="9396222" y="1792224"/>
-            <a:ext cx="1051560" cy="1051560"/>
+            <a:off x="9295638" y="1847087"/>
+            <a:ext cx="1252728" cy="1252728"/>
           </a:xfrm>
           <a:prstGeom prst="rect">
             <a:avLst/>
@@ -9514,8 +9514,8 @@
         </p:nvSpPr>
         <p:spPr>
           <a:xfrm>
-            <a:off x="8182660" y="2916936"/>
-            <a:ext cx="3478682" cy="502920"/>
+            <a:off x="8182660" y="3191256"/>
+            <a:ext cx="3478682" cy="621792"/>
           </a:xfrm>
           <a:prstGeom prst="rect">
             <a:avLst/>

--- a/Seminario de Sistemas/Clases/Clase 12 - Diagramas UML avanzados/Presentacion.pptx
+++ b/Seminario de Sistemas/Clases/Clase 12 - Diagramas UML avanzados/Presentacion.pptx
@@ -3768,7 +3768,7 @@
           <a:lstStyle/>
           <a:p>
             <a:r>
-              <a:rPr sz="1500" b="1" i="0">
+              <a:rPr sz="1400" b="1" i="0">
                 <a:solidFill>
                   <a:srgbClr val="095292"/>
                 </a:solidFill>
@@ -3923,7 +3923,7 @@
           <a:lstStyle/>
           <a:p>
             <a:r>
-              <a:rPr sz="1500" b="1" i="0">
+              <a:rPr sz="1400" b="1" i="0">
                 <a:solidFill>
                   <a:srgbClr val="095292"/>
                 </a:solidFill>
@@ -4388,7 +4388,7 @@
           <a:lstStyle/>
           <a:p>
             <a:r>
-              <a:rPr sz="1500" b="1" i="0">
+              <a:rPr sz="1400" b="1" i="0">
                 <a:solidFill>
                   <a:srgbClr val="095292"/>
                 </a:solidFill>
@@ -5284,7 +5284,7 @@
               </a:spcAft>
             </a:pPr>
             <a:r>
-              <a:rPr sz="1600" b="0" i="0">
+              <a:rPr sz="2000" b="0" i="0">
                 <a:solidFill>
                   <a:srgbClr val="333333"/>
                 </a:solidFill>
@@ -5293,7 +5293,7 @@
               <a:t>–   </a:t>
             </a:r>
             <a:r>
-              <a:rPr sz="1600" b="1" i="0">
+              <a:rPr sz="2000" b="1" i="0">
                 <a:solidFill>
                   <a:srgbClr val="333333"/>
                 </a:solidFill>
@@ -5302,7 +5302,7 @@
               <a:t>Entregable:</a:t>
             </a:r>
             <a:r>
-              <a:rPr sz="1600" b="0" i="0">
+              <a:rPr sz="2000" b="0" i="0">
                 <a:solidFill>
                   <a:srgbClr val="333333"/>
                 </a:solidFill>
@@ -5318,7 +5318,7 @@
               </a:spcAft>
             </a:pPr>
             <a:r>
-              <a:rPr sz="1600" b="0" i="0">
+              <a:rPr sz="2000" b="0" i="0">
                 <a:solidFill>
                   <a:srgbClr val="333333"/>
                 </a:solidFill>
@@ -5327,7 +5327,7 @@
               <a:t>–   </a:t>
             </a:r>
             <a:r>
-              <a:rPr sz="1600" b="1" i="0">
+              <a:rPr sz="2000" b="1" i="0">
                 <a:solidFill>
                   <a:srgbClr val="333333"/>
                 </a:solidFill>
@@ -5336,7 +5336,7 @@
               <a:t>Exito:</a:t>
             </a:r>
             <a:r>
-              <a:rPr sz="1600" b="0" i="0">
+              <a:rPr sz="2000" b="0" i="0">
                 <a:solidFill>
                   <a:srgbClr val="333333"/>
                 </a:solidFill>
@@ -5352,7 +5352,7 @@
               </a:spcAft>
             </a:pPr>
             <a:r>
-              <a:rPr sz="1600" b="0" i="0">
+              <a:rPr sz="2000" b="0" i="0">
                 <a:solidFill>
                   <a:srgbClr val="333333"/>
                 </a:solidFill>
@@ -5361,7 +5361,7 @@
               <a:t>–   </a:t>
             </a:r>
             <a:r>
-              <a:rPr sz="1600" b="1" i="0">
+              <a:rPr sz="2000" b="1" i="0">
                 <a:solidFill>
                   <a:srgbClr val="333333"/>
                 </a:solidFill>
@@ -5370,7 +5370,7 @@
               <a:t>Exito:</a:t>
             </a:r>
             <a:r>
-              <a:rPr sz="1600" b="0" i="0">
+              <a:rPr sz="2000" b="0" i="0">
                 <a:solidFill>
                   <a:srgbClr val="333333"/>
                 </a:solidFill>
@@ -5386,7 +5386,7 @@
               </a:spcAft>
             </a:pPr>
             <a:r>
-              <a:rPr sz="1600" b="0" i="0">
+              <a:rPr sz="2000" b="0" i="0">
                 <a:solidFill>
                   <a:srgbClr val="333333"/>
                 </a:solidFill>
@@ -5395,7 +5395,7 @@
               <a:t>–   </a:t>
             </a:r>
             <a:r>
-              <a:rPr sz="1600" b="1" i="0">
+              <a:rPr sz="2000" b="1" i="0">
                 <a:solidFill>
                   <a:srgbClr val="333333"/>
                 </a:solidFill>
@@ -5404,7 +5404,7 @@
               <a:t>Exito:</a:t>
             </a:r>
             <a:r>
-              <a:rPr sz="1600" b="0" i="0">
+              <a:rPr sz="2000" b="0" i="0">
                 <a:solidFill>
                   <a:srgbClr val="333333"/>
                 </a:solidFill>
@@ -5420,7 +5420,7 @@
               </a:spcAft>
             </a:pPr>
             <a:r>
-              <a:rPr sz="1600" b="0" i="0">
+              <a:rPr sz="2000" b="0" i="0">
                 <a:solidFill>
                   <a:srgbClr val="333333"/>
                 </a:solidFill>
@@ -5429,7 +5429,7 @@
               <a:t>–   </a:t>
             </a:r>
             <a:r>
-              <a:rPr sz="1600" b="1" i="0">
+              <a:rPr sz="2000" b="1" i="0">
                 <a:solidFill>
                   <a:srgbClr val="333333"/>
                 </a:solidFill>
@@ -5438,7 +5438,7 @@
               <a:t>Exito:</a:t>
             </a:r>
             <a:r>
-              <a:rPr sz="1600" b="0" i="0">
+              <a:rPr sz="2000" b="0" i="0">
                 <a:solidFill>
                   <a:srgbClr val="333333"/>
                 </a:solidFill>
@@ -5454,7 +5454,7 @@
               </a:spcAft>
             </a:pPr>
             <a:r>
-              <a:rPr sz="1600" b="0" i="0">
+              <a:rPr sz="2000" b="0" i="0">
                 <a:solidFill>
                   <a:srgbClr val="333333"/>
                 </a:solidFill>
@@ -5463,7 +5463,7 @@
               <a:t>–   </a:t>
             </a:r>
             <a:r>
-              <a:rPr sz="1600" b="1" i="0">
+              <a:rPr sz="2000" b="1" i="0">
                 <a:solidFill>
                   <a:srgbClr val="333333"/>
                 </a:solidFill>
@@ -5472,7 +5472,7 @@
               <a:t>Entrega en ExamLab (https://uniaj.examlab.workers.dev/)</a:t>
             </a:r>
             <a:r>
-              <a:rPr sz="1600" b="0" i="0">
+              <a:rPr sz="2000" b="0" i="0">
                 <a:solidFill>
                   <a:srgbClr val="333333"/>
                 </a:solidFill>
@@ -6519,7 +6519,7 @@
               </a:spcAft>
             </a:pPr>
             <a:r>
-              <a:rPr sz="1600" b="0" i="0">
+              <a:rPr sz="2000" b="0" i="0">
                 <a:solidFill>
                   <a:srgbClr val="333333"/>
                 </a:solidFill>
@@ -6528,7 +6528,7 @@
               <a:t>–   </a:t>
             </a:r>
             <a:r>
-              <a:rPr sz="1600" b="1" i="0">
+              <a:rPr sz="2000" b="1" i="0">
                 <a:solidFill>
                   <a:srgbClr val="333333"/>
                 </a:solidFill>
@@ -6537,7 +6537,7 @@
               <a:t>Hoy avanzamos VetCare en:</a:t>
             </a:r>
             <a:r>
-              <a:rPr sz="1600" b="0" i="0">
+              <a:rPr sz="2000" b="0" i="0">
                 <a:solidFill>
                   <a:srgbClr val="333333"/>
                 </a:solidFill>
@@ -6553,7 +6553,7 @@
               </a:spcAft>
             </a:pPr>
             <a:r>
-              <a:rPr sz="1600" b="0" i="0">
+              <a:rPr sz="2000" b="0" i="0">
                 <a:solidFill>
                   <a:srgbClr val="333333"/>
                 </a:solidFill>
@@ -6562,7 +6562,7 @@
               <a:t>–   Herramienta: </a:t>
             </a:r>
             <a:r>
-              <a:rPr sz="1600" b="1" i="0">
+              <a:rPr sz="2000" b="1" i="0">
                 <a:solidFill>
                   <a:srgbClr val="333333"/>
                 </a:solidFill>
@@ -6571,7 +6571,7 @@
               <a:t>draw.io · Mermaid Live Editor</a:t>
             </a:r>
             <a:r>
-              <a:rPr sz="1600" b="0" i="0">
+              <a:rPr sz="2000" b="0" i="0">
                 <a:solidFill>
                   <a:srgbClr val="333333"/>
                 </a:solidFill>
@@ -6580,7 +6580,7 @@
               <a:t> · Bloque </a:t>
             </a:r>
             <a:r>
-              <a:rPr sz="1600" b="1" i="0">
+              <a:rPr sz="2000" b="1" i="0">
                 <a:solidFill>
                   <a:srgbClr val="333333"/>
                 </a:solidFill>
@@ -6596,7 +6596,7 @@
               </a:spcAft>
             </a:pPr>
             <a:r>
-              <a:rPr sz="1600" b="0" i="0">
+              <a:rPr sz="2000" b="0" i="0">
                 <a:solidFill>
                   <a:srgbClr val="333333"/>
                 </a:solidFill>
@@ -6605,7 +6605,7 @@
               <a:t>–   </a:t>
             </a:r>
             <a:r>
-              <a:rPr sz="1600" b="1" i="0">
+              <a:rPr sz="2000" b="1" i="0">
                 <a:solidFill>
                   <a:srgbClr val="333333"/>
                 </a:solidFill>
@@ -6614,7 +6614,7 @@
               <a:t>Entregable de hoy:</a:t>
             </a:r>
             <a:r>
-              <a:rPr sz="1600" b="0" i="0">
+              <a:rPr sz="2000" b="0" i="0">
                 <a:solidFill>
                   <a:srgbClr val="333333"/>
                 </a:solidFill>
@@ -6630,7 +6630,7 @@
               </a:spcAft>
             </a:pPr>
             <a:r>
-              <a:rPr sz="1600" b="0" i="0">
+              <a:rPr sz="2000" b="0" i="0">
                 <a:solidFill>
                   <a:srgbClr val="333333"/>
                 </a:solidFill>
@@ -6954,7 +6954,7 @@
         <p:spPr>
           <a:xfrm>
             <a:off x="502920" y="2587752"/>
-            <a:ext cx="2164019" cy="2560320"/>
+            <a:ext cx="2164019" cy="3310128"/>
           </a:xfrm>
           <a:prstGeom prst="rect">
             <a:avLst/>
@@ -7069,7 +7069,7 @@
         <p:spPr>
           <a:xfrm>
             <a:off x="2758379" y="2587752"/>
-            <a:ext cx="2164019" cy="2560320"/>
+            <a:ext cx="2164019" cy="3310128"/>
           </a:xfrm>
           <a:prstGeom prst="rect">
             <a:avLst/>
@@ -7184,7 +7184,7 @@
         <p:spPr>
           <a:xfrm>
             <a:off x="5013838" y="2587752"/>
-            <a:ext cx="2164019" cy="2560320"/>
+            <a:ext cx="2164019" cy="3310128"/>
           </a:xfrm>
           <a:prstGeom prst="rect">
             <a:avLst/>
@@ -7299,7 +7299,7 @@
         <p:spPr>
           <a:xfrm>
             <a:off x="7269297" y="2587752"/>
-            <a:ext cx="2164019" cy="2560320"/>
+            <a:ext cx="2164019" cy="3310128"/>
           </a:xfrm>
           <a:prstGeom prst="rect">
             <a:avLst/>
@@ -7414,7 +7414,7 @@
         <p:spPr>
           <a:xfrm>
             <a:off x="9524756" y="2587752"/>
-            <a:ext cx="2164019" cy="2560320"/>
+            <a:ext cx="2164019" cy="3310128"/>
           </a:xfrm>
           <a:prstGeom prst="rect">
             <a:avLst/>
@@ -7448,8 +7448,8 @@
         </p:nvSpPr>
         <p:spPr>
           <a:xfrm>
-            <a:off x="457200" y="5943600"/>
-            <a:ext cx="11277295" cy="365760"/>
+            <a:off x="457200" y="5806440"/>
+            <a:ext cx="11277295" cy="640080"/>
           </a:xfrm>
           <a:prstGeom prst="rect">
             <a:avLst/>
@@ -7702,7 +7702,7 @@
               </a:spcAft>
             </a:pPr>
             <a:r>
-              <a:rPr sz="1500" b="0" i="0">
+              <a:rPr sz="2000" b="0" i="0">
                 <a:solidFill>
                   <a:srgbClr val="333333"/>
                 </a:solidFill>
@@ -7718,7 +7718,7 @@
               </a:spcAft>
             </a:pPr>
             <a:r>
-              <a:rPr sz="1500" b="0" i="0">
+              <a:rPr sz="2000" b="0" i="0">
                 <a:solidFill>
                   <a:srgbClr val="333333"/>
                 </a:solidFill>
@@ -7734,7 +7734,7 @@
               </a:spcAft>
             </a:pPr>
             <a:r>
-              <a:rPr sz="1500" b="0" i="0">
+              <a:rPr sz="2000" b="0" i="0">
                 <a:solidFill>
                   <a:srgbClr val="333333"/>
                 </a:solidFill>
@@ -7750,7 +7750,7 @@
               </a:spcAft>
             </a:pPr>
             <a:r>
-              <a:rPr sz="1500" b="0" i="0">
+              <a:rPr sz="2000" b="0" i="0">
                 <a:solidFill>
                   <a:srgbClr val="333333"/>
                 </a:solidFill>
@@ -7766,7 +7766,7 @@
               </a:spcAft>
             </a:pPr>
             <a:r>
-              <a:rPr sz="1500" b="0" i="0">
+              <a:rPr sz="2000" b="0" i="0">
                 <a:solidFill>
                   <a:srgbClr val="333333"/>
                 </a:solidFill>
@@ -8087,7 +8087,7 @@
         <p:spPr>
           <a:xfrm>
             <a:off x="777240" y="1719072"/>
-            <a:ext cx="10637215" cy="4133087"/>
+            <a:ext cx="5181447" cy="4133087"/>
           </a:xfrm>
           <a:prstGeom prst="rect">
             <a:avLst/>
@@ -8259,6 +8259,29 @@
               <a:t>    REPM--&gt;&gt;CTRL: mascota</a:t>
             </a:r>
           </a:p>
+        </p:txBody>
+      </p:sp>
+      <p:sp>
+        <p:nvSpPr>
+          <p:cNvPr id="9" name="TextBox 8"/>
+          <p:cNvSpPr txBox="1"/>
+          <p:nvPr/>
+        </p:nvSpPr>
+        <p:spPr>
+          <a:xfrm>
+            <a:off x="6233007" y="1719072"/>
+            <a:ext cx="5181447" cy="4133087"/>
+          </a:xfrm>
+          <a:prstGeom prst="rect">
+            <a:avLst/>
+          </a:prstGeom>
+          <a:noFill/>
+        </p:spPr>
+        <p:txBody>
+          <a:bodyPr wrap="square">
+            <a:spAutoFit/>
+          </a:bodyPr>
+          <a:lstStyle/>
           <a:p>
             <a:pPr>
               <a:spcAft>
@@ -8407,7 +8430,7 @@
       </p:sp>
       <p:sp>
         <p:nvSpPr>
-          <p:cNvPr id="9" name="TextBox 8"/>
+          <p:cNvPr id="10" name="TextBox 9"/>
           <p:cNvSpPr txBox="1"/>
           <p:nvPr/>
         </p:nvSpPr>
@@ -8442,7 +8465,7 @@
       </p:sp>
       <p:sp>
         <p:nvSpPr>
-          <p:cNvPr id="10" name="TextBox 9"/>
+          <p:cNvPr id="11" name="TextBox 10"/>
           <p:cNvSpPr txBox="1"/>
           <p:nvPr/>
         </p:nvSpPr>
@@ -8649,7 +8672,7 @@
               </a:spcAft>
             </a:pPr>
             <a:r>
-              <a:rPr sz="1600" b="0" i="0">
+              <a:rPr sz="2000" b="0" i="0">
                 <a:solidFill>
                   <a:srgbClr val="333333"/>
                 </a:solidFill>
@@ -8658,7 +8681,7 @@
               <a:t>–   </a:t>
             </a:r>
             <a:r>
-              <a:rPr sz="1600" b="1" i="0">
+              <a:rPr sz="2000" b="1" i="0">
                 <a:solidFill>
                   <a:srgbClr val="333333"/>
                 </a:solidFill>
@@ -8667,7 +8690,7 @@
               <a:t>Herramienta:</a:t>
             </a:r>
             <a:r>
-              <a:rPr sz="1600" b="0" i="0">
+              <a:rPr sz="2000" b="0" i="0">
                 <a:solidFill>
                   <a:srgbClr val="333333"/>
                 </a:solidFill>
@@ -8683,7 +8706,7 @@
               </a:spcAft>
             </a:pPr>
             <a:r>
-              <a:rPr sz="1600" b="0" i="0">
+              <a:rPr sz="2000" b="0" i="0">
                 <a:solidFill>
                   <a:srgbClr val="333333"/>
                 </a:solidFill>
@@ -8692,7 +8715,7 @@
               <a:t>–   </a:t>
             </a:r>
             <a:r>
-              <a:rPr sz="1600" b="1" i="0">
+              <a:rPr sz="2000" b="1" i="0">
                 <a:solidFill>
                   <a:srgbClr val="333333"/>
                 </a:solidFill>
@@ -8701,7 +8724,7 @@
               <a:t>Demo:</a:t>
             </a:r>
             <a:r>
-              <a:rPr sz="1600" b="0" i="0">
+              <a:rPr sz="2000" b="0" i="0">
                 <a:solidFill>
                   <a:srgbClr val="333333"/>
                 </a:solidFill>
@@ -8717,7 +8740,7 @@
               </a:spcAft>
             </a:pPr>
             <a:r>
-              <a:rPr sz="1600" b="0" i="0">
+              <a:rPr sz="2000" b="0" i="0">
                 <a:solidFill>
                   <a:srgbClr val="333333"/>
                 </a:solidFill>
@@ -9764,7 +9787,7 @@
               </a:spcAft>
             </a:pPr>
             <a:r>
-              <a:rPr sz="1600" b="0" i="0">
+              <a:rPr sz="2000" b="0" i="0">
                 <a:solidFill>
                   <a:srgbClr val="333333"/>
                 </a:solidFill>
@@ -9773,7 +9796,7 @@
               <a:t>–   </a:t>
             </a:r>
             <a:r>
-              <a:rPr sz="1600" b="1" i="0">
+              <a:rPr sz="2000" b="1" i="0">
                 <a:solidFill>
                   <a:srgbClr val="333333"/>
                 </a:solidFill>
@@ -9782,7 +9805,7 @@
               <a:t>Por que importa al PI:</a:t>
             </a:r>
             <a:r>
-              <a:rPr sz="1600" b="0" i="0">
+              <a:rPr sz="2000" b="0" i="0">
                 <a:solidFill>
                   <a:srgbClr val="333333"/>
                 </a:solidFill>
@@ -9798,7 +9821,7 @@
               </a:spcAft>
             </a:pPr>
             <a:r>
-              <a:rPr sz="1600" b="0" i="0">
+              <a:rPr sz="2000" b="0" i="0">
                 <a:solidFill>
                   <a:srgbClr val="333333"/>
                 </a:solidFill>
@@ -9814,7 +9837,7 @@
               </a:spcAft>
             </a:pPr>
             <a:r>
-              <a:rPr sz="1600" b="0" i="0">
+              <a:rPr sz="2000" b="0" i="0">
                 <a:solidFill>
                   <a:srgbClr val="333333"/>
                 </a:solidFill>
@@ -10034,7 +10057,7 @@
               </a:spcAft>
             </a:pPr>
             <a:r>
-              <a:rPr sz="1600" b="0" i="0">
+              <a:rPr sz="2000" b="0" i="0">
                 <a:solidFill>
                   <a:srgbClr val="333333"/>
                 </a:solidFill>
@@ -10050,7 +10073,7 @@
               </a:spcAft>
             </a:pPr>
             <a:r>
-              <a:rPr sz="1600" b="0" i="0">
+              <a:rPr sz="2000" b="0" i="0">
                 <a:solidFill>
                   <a:srgbClr val="333333"/>
                 </a:solidFill>
@@ -10066,7 +10089,7 @@
               </a:spcAft>
             </a:pPr>
             <a:r>
-              <a:rPr sz="1600" b="0" i="0">
+              <a:rPr sz="2000" b="0" i="0">
                 <a:solidFill>
                   <a:srgbClr val="333333"/>
                 </a:solidFill>

--- a/Seminario de Sistemas/Clases/Clase 12 - Diagramas UML avanzados/Presentacion.pptx
+++ b/Seminario de Sistemas/Clases/Clase 12 - Diagramas UML avanzados/Presentacion.pptx
@@ -4394,7 +4394,7 @@
                 </a:solidFill>
                 <a:latin typeface="Calibri"/>
               </a:rPr>
-              <a:t>Dibujar el diagrama de actividad del proceso de atencion en el consultorio con cuatro calles (Propietario, Recepcionista, Veterinario y Sistema VetCare), con minimo dos nodos de decision y una bifurcacion en paralelo, y exportar todo a PDF para subirlo a ExamLab.</a:t>
+              <a:t>Dibujar el diagrama de actividad del proceso de atencion en el consultorio con cuatro calles (Propietario, Recepcionista, Veterinario y Sistema VetCare), con minimo dos nodos de decision y una bifurcacion en paralelo, y exportar todo a PDF para subirlo a la plataforma del curso.</a:t>
             </a:r>
           </a:p>
         </p:txBody>
@@ -5308,7 +5308,7 @@
                 </a:solidFill>
                 <a:latin typeface="Calibri"/>
               </a:rPr>
-              <a:t> Un PDF con el diagrama de secuencia de Agendar cita incluyendo el fragmento alt para horario ocupado, el diagrama de actividad del proceso de atencion con calles por rol, y la tabla que mapea cada mensaje del diagrama de secuencia a una operacion del diagrama de clases, subido a ExamLab.</a:t>
+              <a:t> Un PDF con el diagrama de secuencia de Agendar cita incluyendo el fragmento alt para horario ocupado, el diagrama de actividad del proceso de atencion con calles por rol, y la tabla que mapea cada mensaje del diagrama de secuencia a una operacion del diagrama de clases, subido a la plataforma del curso.</a:t>
             </a:r>
           </a:p>
           <a:p>
@@ -5469,7 +5469,7 @@
                 </a:solidFill>
                 <a:latin typeface="Calibri"/>
               </a:rPr>
-              <a:t>Entrega en ExamLab (https://uniaj.examlab.workers.dev/)</a:t>
+              <a:t>Entrega en la plataforma del curso</a:t>
             </a:r>
             <a:r>
               <a:rPr sz="2000" b="0" i="0">
@@ -5478,7 +5478,7 @@
                 </a:solidFill>
                 <a:latin typeface="Calibri"/>
               </a:rPr>
-              <a:t> — domingo 23:59.</a:t>
+              <a:t> — en la fecha que indique el docente.</a:t>
             </a:r>
           </a:p>
         </p:txBody>
@@ -6073,7 +6073,7 @@
                 </a:solidFill>
                 <a:latin typeface="Calibri"/>
               </a:rPr>
-              <a:t>Entrega del taller en ExamLab (https://uniaj.examlab.workers.dev/) · domingo 23:59.</a:t>
+              <a:t>Entrega del taller, si el docente lo asigna · en la fecha que indique el docente.</a:t>
             </a:r>
           </a:p>
         </p:txBody>
@@ -6289,7 +6289,7 @@
                 </a:solidFill>
                 <a:latin typeface="Calibri"/>
               </a:rPr>
-              <a:t>Entregable: Un PDF con el diagrama de secuencia de Agendar cita incluyendo el fragmento alt para horario ocupado, el diagrama de actividad del proceso de atencion con calles por rol, y la tabla que mapea cada mensaje del diagrama de secuencia a una operacion del diagrama de clases, subido a ExamLab.</a:t>
+              <a:t>Entregable: Un PDF con el diagrama de secuencia de Agendar cita incluyendo el fragmento alt para horario ocupado, el diagrama de actividad del proceso de atencion con calles por rol, y la tabla que mapea cada mensaje del diagrama de secuencia a una operacion del diagrama de clases, subido a la plataforma del curso.</a:t>
             </a:r>
           </a:p>
           <a:p>
@@ -6620,7 +6620,7 @@
                 </a:solidFill>
                 <a:latin typeface="Calibri"/>
               </a:rPr>
-              <a:t> Un PDF con el diagrama de secuencia de Agendar cita incluyendo el fragmento alt para horario ocupado, el diagrama de actividad del proceso de atencion con calles por rol, y la tabla que mapea cada mensaje del diagrama de secuencia a una operacion del diagrama de clases, subido a ExamLab.</a:t>
+              <a:t> Un PDF con el diagrama de secuencia de Agendar cita incluyendo el fragmento alt para horario ocupado, el diagrama de actividad del proceso de atencion con calles por rol, y la tabla que mapea cada mensaje del diagrama de secuencia a una operacion del diagrama de clases, subido a la plataforma del curso.</a:t>
             </a:r>
           </a:p>
           <a:p>
@@ -9557,7 +9557,7 @@
                 </a:solidFill>
                 <a:latin typeface="Calibri"/>
               </a:rPr>
-              <a:t>ExamLab</a:t>
+              <a:t>la plataforma del curso</a:t>
             </a:r>
           </a:p>
           <a:p>
@@ -9573,7 +9573,7 @@
                 </a:solidFill>
                 <a:latin typeface="Calibri"/>
               </a:rPr>
-              <a:t>Entrega del taller · domingo 23:59</a:t>
+              <a:t>Entrega del taller · en la fecha que indique el docente</a:t>
             </a:r>
           </a:p>
         </p:txBody>
